--- a/assets/pptx/catalog-2424.pptx
+++ b/assets/pptx/catalog-2424.pptx
@@ -3300,7 +3300,7 @@
                 <a:ea typeface="Ebrima"/>
                 <a:cs typeface="Ebrima"/>
               </a:rPr>
-              <a:t>ግራ ተጋብቷል ጠላት በደስታዬ (3x)</a:t>
+              <a:t>ግራ ተጋብቷል ጠላት በደስታዬ 3x</a:t>
             </a:r>
           </a:p>
         </p:txBody>
@@ -3421,7 +3421,7 @@
                 <a:ea typeface="Ebrima"/>
                 <a:cs typeface="Ebrima"/>
               </a:rPr>
-              <a:t>ኢየሱስ እኮ ነው የኔ ደስታ (ጌታ) (4x)</a:t>
+              <a:t>ኢየሱስ እኮ ነው የኔ ደስታ ጌታ 4x</a:t>
             </a:r>
           </a:p>
         </p:txBody>
@@ -3542,7 +3542,7 @@
                 <a:ea typeface="Ebrima"/>
                 <a:cs typeface="Ebrima"/>
               </a:rPr>
-              <a:t>ደስተኛ ነኝ ሁሌ በእግዚአብሔር (3x)</a:t>
+              <a:t>ደስተኛ ነኝ ሁሌ በእግዚአብሔር 3x</a:t>
             </a:r>
           </a:p>
         </p:txBody>
@@ -3663,7 +3663,7 @@
                 <a:ea typeface="Ebrima"/>
                 <a:cs typeface="Ebrima"/>
               </a:rPr>
-              <a:t>ኢየሱስ እኮ ነው የኔ ደስታ (ጌታ) (4x)</a:t>
+              <a:t>ኢየሱስ እኮ ነው የኔ ደስታ ጌታ 4x</a:t>
             </a:r>
           </a:p>
         </p:txBody>
@@ -3784,7 +3784,7 @@
                 <a:ea typeface="Ebrima"/>
                 <a:cs typeface="Ebrima"/>
               </a:rPr>
-              <a:t>ደስታዬ ፍጹም መቼም ማይወሰድ ነው (3x)</a:t>
+              <a:t>ደስታዬ ፍጹም መቼም ማይወሰድ ነው 3x</a:t>
             </a:r>
           </a:p>
         </p:txBody>
@@ -3905,7 +3905,7 @@
                 <a:ea typeface="Ebrima"/>
                 <a:cs typeface="Ebrima"/>
               </a:rPr>
-              <a:t>ኢየሱስ እኮ ነው የኔ ደስታ (ጌታ) (4x)</a:t>
+              <a:t>ኢየሱስ እኮ ነው የኔ ደስታ ጌታ 4x</a:t>
             </a:r>
           </a:p>
         </p:txBody>
